--- a/MS Elevate AICTE Internship - Project template - Feb 2026.pptx
+++ b/MS Elevate AICTE Internship - Project template - Feb 2026.pptx
@@ -6,7 +6,7 @@
     <p:sldMasterId id="2147483654" r:id="rId2"/>
   </p:sldMasterIdLst>
   <p:notesMasterIdLst>
-    <p:notesMasterId r:id="rId14"/>
+    <p:notesMasterId r:id="rId15"/>
   </p:notesMasterIdLst>
   <p:sldIdLst>
     <p:sldId id="256" r:id="rId3"/>
@@ -16,15 +16,16 @@
     <p:sldId id="574" r:id="rId7"/>
     <p:sldId id="575" r:id="rId8"/>
     <p:sldId id="576" r:id="rId9"/>
-    <p:sldId id="577" r:id="rId10"/>
-    <p:sldId id="579" r:id="rId11"/>
-    <p:sldId id="578" r:id="rId12"/>
-    <p:sldId id="536" r:id="rId13"/>
+    <p:sldId id="580" r:id="rId10"/>
+    <p:sldId id="577" r:id="rId11"/>
+    <p:sldId id="579" r:id="rId12"/>
+    <p:sldId id="578" r:id="rId13"/>
+    <p:sldId id="536" r:id="rId14"/>
   </p:sldIdLst>
   <p:sldSz cx="12192000" cy="6858000"/>
   <p:notesSz cx="6858000" cy="9144000"/>
   <p:custDataLst>
-    <p:tags r:id="rId15"/>
+    <p:tags r:id="rId16"/>
   </p:custDataLst>
   <p:defaultTextStyle>
     <a:defPPr>
@@ -643,7 +644,7 @@
           <a:p>
             <a:fld id="{F3065E4E-ABE4-4C79-8716-B93932D5FBD3}" type="slidenum">
               <a:rPr lang="en-IN" smtClean="0"/>
-              <a:t>11</a:t>
+              <a:t>12</a:t>
             </a:fld>
             <a:endParaRPr lang="en-IN"/>
           </a:p>
@@ -3001,6 +3002,165 @@
                 <a:latin typeface="Arial" panose="020B0604020202020204"/>
                 <a:cs typeface="Arial" panose="020B0604020202020204"/>
               </a:rPr>
+              <a:t>Future scope:</a:t>
+            </a:r>
+            <a:endParaRPr lang="en-US" sz="4000" dirty="0"/>
+          </a:p>
+        </p:txBody>
+      </p:sp>
+      <p:sp>
+        <p:nvSpPr>
+          <p:cNvPr id="3" name="Content Placeholder 2"/>
+          <p:cNvSpPr>
+            <a:spLocks noGrp="1"/>
+          </p:cNvSpPr>
+          <p:nvPr>
+            <p:ph idx="1"/>
+          </p:nvPr>
+        </p:nvSpPr>
+        <p:spPr>
+          <a:xfrm>
+            <a:off x="268071" y="1304434"/>
+            <a:ext cx="10515600" cy="4251960"/>
+          </a:xfrm>
+        </p:spPr>
+        <p:txBody>
+          <a:bodyPr vert="horz" lIns="91440" tIns="45720" rIns="91440" bIns="45720" rtlCol="0">
+            <a:normAutofit/>
+          </a:bodyPr>
+          <a:lstStyle/>
+          <a:p>
+            <a:r>
+              <a:rPr lang="en-US" sz="2400" dirty="0"/>
+              <a:t>The dashboard can be enhanced by integrating </a:t>
+            </a:r>
+            <a:r>
+              <a:rPr lang="en-US" sz="2400" b="1" dirty="0"/>
+              <a:t>real-time sales data</a:t>
+            </a:r>
+            <a:r>
+              <a:rPr lang="en-US" sz="2400" dirty="0"/>
+              <a:t> from live business systems.</a:t>
+            </a:r>
+          </a:p>
+          <a:p>
+            <a:r>
+              <a:rPr lang="en-US" sz="2400" dirty="0"/>
+              <a:t>Additional datasets such as </a:t>
+            </a:r>
+            <a:r>
+              <a:rPr lang="en-US" sz="2400" b="1" dirty="0"/>
+              <a:t>customer demographics, marketing campaigns, and seasonal trends</a:t>
+            </a:r>
+            <a:r>
+              <a:rPr lang="en-US" sz="2400" dirty="0"/>
+              <a:t> can be incorporated for deeper analysis.</a:t>
+            </a:r>
+          </a:p>
+          <a:p>
+            <a:r>
+              <a:rPr lang="en-US" sz="2400" dirty="0"/>
+              <a:t>Advanced analytics techniques such as </a:t>
+            </a:r>
+            <a:r>
+              <a:rPr lang="en-US" sz="2400" b="1" dirty="0"/>
+              <a:t>predictive sales forecasting</a:t>
+            </a:r>
+            <a:r>
+              <a:rPr lang="en-US" sz="2400" dirty="0"/>
+              <a:t> can be implemented to estimate future sales trends.</a:t>
+            </a:r>
+          </a:p>
+          <a:p>
+            <a:r>
+              <a:rPr lang="en-US" sz="2400" dirty="0"/>
+              <a:t>The dashboard can be expanded to analyze </a:t>
+            </a:r>
+            <a:r>
+              <a:rPr lang="en-US" sz="2400" b="1" dirty="0"/>
+              <a:t>multiple regions, cities, or international markets</a:t>
+            </a:r>
+            <a:r>
+              <a:rPr lang="en-US" sz="2400" dirty="0"/>
+              <a:t>.</a:t>
+            </a:r>
+          </a:p>
+          <a:p>
+            <a:r>
+              <a:rPr lang="en-US" sz="2400" dirty="0"/>
+              <a:t>Integration with </a:t>
+            </a:r>
+            <a:r>
+              <a:rPr lang="en-US" sz="2400" b="1" dirty="0"/>
+              <a:t>cloud platforms and automated data refresh</a:t>
+            </a:r>
+            <a:r>
+              <a:rPr lang="en-US" sz="2400" dirty="0"/>
+              <a:t> can improve accessibility and scalability.</a:t>
+            </a:r>
+          </a:p>
+        </p:txBody>
+      </p:sp>
+    </p:spTree>
+  </p:cSld>
+  <p:clrMapOvr>
+    <a:masterClrMapping/>
+  </p:clrMapOvr>
+</p:sld>
+</file>
+
+<file path=ppt/slides/slide11.xml><?xml version="1.0" encoding="utf-8"?>
+<p:sld xmlns:a="http://schemas.openxmlformats.org/drawingml/2006/main" xmlns:r="http://schemas.openxmlformats.org/officeDocument/2006/relationships" xmlns:p="http://schemas.openxmlformats.org/presentationml/2006/main">
+  <p:cSld>
+    <p:bg>
+      <p:bgPr>
+        <a:solidFill>
+          <a:schemeClr val="bg1"/>
+        </a:solidFill>
+        <a:effectLst/>
+      </p:bgPr>
+    </p:bg>
+    <p:spTree>
+      <p:nvGrpSpPr>
+        <p:cNvPr id="1" name=""/>
+        <p:cNvGrpSpPr/>
+        <p:nvPr/>
+      </p:nvGrpSpPr>
+      <p:grpSpPr>
+        <a:xfrm>
+          <a:off x="0" y="0"/>
+          <a:ext cx="0" cy="0"/>
+          <a:chOff x="0" y="0"/>
+          <a:chExt cx="0" cy="0"/>
+        </a:xfrm>
+      </p:grpSpPr>
+      <p:sp>
+        <p:nvSpPr>
+          <p:cNvPr id="2" name="Title 1"/>
+          <p:cNvSpPr>
+            <a:spLocks noGrp="1"/>
+          </p:cNvSpPr>
+          <p:nvPr>
+            <p:ph type="title"/>
+          </p:nvPr>
+        </p:nvSpPr>
+        <p:spPr>
+          <a:xfrm>
+            <a:off x="-548" y="606334"/>
+            <a:ext cx="10515600" cy="1325563"/>
+          </a:xfrm>
+        </p:spPr>
+        <p:txBody>
+          <a:bodyPr lIns="91440" tIns="45720" rIns="91440" bIns="45720" anchor="t">
+            <a:normAutofit/>
+          </a:bodyPr>
+          <a:lstStyle/>
+          <a:p>
+            <a:r>
+              <a:rPr lang="en-US" sz="4000" b="1" cap="all">
+                <a:latin typeface="Arial" panose="020B0604020202020204"/>
+                <a:cs typeface="Arial" panose="020B0604020202020204"/>
+              </a:rPr>
               <a:t>References:</a:t>
             </a:r>
             <a:endParaRPr lang="en-US" sz="4000"/>
@@ -3030,91 +3190,91 @@
           <a:lstStyle/>
           <a:p>
             <a:r>
-              <a:rPr lang="en-IN" sz="2400" dirty="0"/>
+              <a:rPr lang="en-IN" sz="1600" dirty="0"/>
               <a:t>Microsoft Power BI Documentation – </a:t>
             </a:r>
             <a:r>
-              <a:rPr lang="en-IN" sz="2400" dirty="0">
+              <a:rPr lang="en-IN" sz="1600" dirty="0">
                 <a:hlinkClick r:id="rId2"/>
               </a:rPr>
               <a:t>https://powerbi.microsoft.com</a:t>
             </a:r>
-            <a:endParaRPr lang="en-IN" sz="2400" dirty="0"/>
-          </a:p>
-          <a:p>
-            <a:r>
-              <a:rPr lang="en-IN" sz="2400" dirty="0"/>
+            <a:endParaRPr lang="en-IN" sz="1600" dirty="0"/>
+          </a:p>
+          <a:p>
+            <a:r>
+              <a:rPr lang="en-IN" sz="1600" dirty="0"/>
               <a:t>Ferrari, A., &amp; Russo, M. (2016). </a:t>
             </a:r>
             <a:r>
-              <a:rPr lang="en-IN" sz="2400" i="1" dirty="0"/>
+              <a:rPr lang="en-IN" sz="1600" i="1" dirty="0"/>
               <a:t>Introducing Microsoft Power BI</a:t>
             </a:r>
             <a:r>
-              <a:rPr lang="en-IN" sz="2400" dirty="0"/>
+              <a:rPr lang="en-IN" sz="1600" dirty="0"/>
               <a:t>. Microsoft Press.</a:t>
             </a:r>
           </a:p>
           <a:p>
             <a:r>
-              <a:rPr lang="en-IN" sz="2400" dirty="0"/>
+              <a:rPr lang="en-IN" sz="1600" dirty="0"/>
               <a:t>Powell, B. (2017). </a:t>
             </a:r>
             <a:r>
-              <a:rPr lang="en-IN" sz="2400" i="1" dirty="0"/>
+              <a:rPr lang="en-IN" sz="1600" i="1" dirty="0"/>
               <a:t>Microsoft Power BI Cookbook</a:t>
             </a:r>
             <a:r>
-              <a:rPr lang="en-IN" sz="2400" dirty="0"/>
+              <a:rPr lang="en-IN" sz="1600" dirty="0"/>
               <a:t>. </a:t>
             </a:r>
             <a:r>
-              <a:rPr lang="en-IN" sz="2400" dirty="0" err="1"/>
+              <a:rPr lang="en-IN" sz="1600" dirty="0" err="1"/>
               <a:t>Packt</a:t>
             </a:r>
             <a:r>
-              <a:rPr lang="en-IN" sz="2400" dirty="0"/>
+              <a:rPr lang="en-IN" sz="1600" dirty="0"/>
               <a:t> Publishing.</a:t>
             </a:r>
           </a:p>
           <a:p>
             <a:r>
-              <a:rPr lang="en-IN" sz="2400" dirty="0"/>
+              <a:rPr lang="en-IN" sz="1600" dirty="0"/>
               <a:t>Tirupati, K., Joshi, A., &amp; Singh, S. (2023). </a:t>
             </a:r>
             <a:r>
-              <a:rPr lang="en-IN" sz="2400" i="1" dirty="0"/>
+              <a:rPr lang="en-IN" sz="1600" i="1" dirty="0"/>
               <a:t>Leveraging Power BI for Enhanced Data Visualization and Business Intelligence</a:t>
             </a:r>
             <a:r>
-              <a:rPr lang="en-IN" sz="2400" dirty="0"/>
+              <a:rPr lang="en-IN" sz="1600" dirty="0"/>
               <a:t>. </a:t>
             </a:r>
           </a:p>
           <a:p>
             <a:r>
-              <a:rPr lang="en-IN" sz="2400" dirty="0"/>
+              <a:rPr lang="en-IN" sz="1600" dirty="0"/>
               <a:t>Gonçalves, C. (2023). </a:t>
             </a:r>
             <a:r>
-              <a:rPr lang="en-IN" sz="2400" i="1" dirty="0"/>
+              <a:rPr lang="en-IN" sz="1600" i="1" dirty="0"/>
               <a:t>Developing Integrated Performance Dashboards using Power BI</a:t>
             </a:r>
             <a:r>
-              <a:rPr lang="en-IN" sz="2400" dirty="0"/>
+              <a:rPr lang="en-IN" sz="1600" dirty="0"/>
               <a:t>. </a:t>
             </a:r>
           </a:p>
           <a:p>
             <a:r>
-              <a:rPr lang="en-IN" sz="2400" b="1" dirty="0"/>
+              <a:rPr lang="en-IN" sz="1600" b="1" dirty="0"/>
               <a:t>GitHub Link:</a:t>
             </a:r>
             <a:br>
-              <a:rPr lang="en-IN" sz="2400" dirty="0"/>
+              <a:rPr lang="en-IN" sz="1600" dirty="0"/>
             </a:br>
             <a:r>
-              <a:rPr lang="en-IN" sz="2400" dirty="0"/>
+              <a:rPr lang="en-IN" sz="1600" dirty="0"/>
               <a:t>https://github.com/Karthik6-cpu/powerbi-ecommerce-dashboard.git</a:t>
             </a:r>
           </a:p>
@@ -3122,7 +3282,7 @@
             <a:pPr marL="0" indent="0">
               <a:buNone/>
             </a:pPr>
-            <a:endParaRPr lang="en-IN" sz="2200" u="sng" dirty="0">
+            <a:endParaRPr lang="en-IN" sz="1600" u="sng" dirty="0">
               <a:solidFill>
                 <a:srgbClr val="0070C0"/>
               </a:solidFill>
@@ -3133,7 +3293,7 @@
             <a:pPr marL="0" indent="0">
               <a:buNone/>
             </a:pPr>
-            <a:endParaRPr lang="en-IN" sz="2200" dirty="0">
+            <a:endParaRPr lang="en-IN" sz="1600" dirty="0">
               <a:latin typeface="Franklin Gothic Book" panose="020B0503020102020204"/>
             </a:endParaRPr>
           </a:p>
@@ -3147,7 +3307,7 @@
 </p:sld>
 </file>
 
-<file path=ppt/slides/slide11.xml><?xml version="1.0" encoding="utf-8"?>
+<file path=ppt/slides/slide12.xml><?xml version="1.0" encoding="utf-8"?>
 <p:sld xmlns:a="http://schemas.openxmlformats.org/drawingml/2006/main" xmlns:r="http://schemas.openxmlformats.org/officeDocument/2006/relationships" xmlns:p="http://schemas.openxmlformats.org/presentationml/2006/main">
   <p:cSld>
     <p:spTree>
@@ -3732,65 +3892,65 @@
           <a:lstStyle/>
           <a:p>
             <a:r>
-              <a:rPr lang="en-US" sz="1800" dirty="0"/>
-              <a:t>n today’s competitive e-commerce environment, businesses generate a large amount of sales and customer data every day. However, many organizations struggle to </a:t>
-            </a:r>
-            <a:r>
-              <a:rPr lang="en-US" sz="1800" b="1" dirty="0"/>
+              <a:rPr lang="en-US" sz="1600" dirty="0"/>
+              <a:t>In today’s competitive e-commerce environment, businesses generate a large amount of sales and customer data every day. However, many organizations struggle to </a:t>
+            </a:r>
+            <a:r>
+              <a:rPr lang="en-US" sz="1600" b="1" dirty="0"/>
               <a:t>analyze this data effectively</a:t>
             </a:r>
             <a:r>
-              <a:rPr lang="en-US" sz="1800" dirty="0"/>
+              <a:rPr lang="en-US" sz="1600" dirty="0"/>
               <a:t> and extract meaningful insights that can support better business decisions. Raw data stored in spreadsheets or databases is often complex and difficult to interpret without proper visualization tools.</a:t>
             </a:r>
           </a:p>
           <a:p>
             <a:r>
-              <a:rPr lang="en-US" sz="1800" dirty="0"/>
+              <a:rPr lang="en-US" sz="1600" dirty="0"/>
               <a:t>The main problem is the </a:t>
             </a:r>
             <a:r>
-              <a:rPr lang="en-US" sz="1800" b="1" dirty="0"/>
+              <a:rPr lang="en-US" sz="1600" b="1" dirty="0"/>
               <a:t>lack of an interactive and centralized system</a:t>
             </a:r>
             <a:r>
-              <a:rPr lang="en-US" sz="1800" dirty="0"/>
+              <a:rPr lang="en-US" sz="1600" dirty="0"/>
               <a:t> that allows stakeholders to quickly understand key metrics such as sales performance, product demand, regional sales distribution, and customer purchasing behavior.</a:t>
             </a:r>
           </a:p>
           <a:p>
             <a:r>
-              <a:rPr lang="en-US" sz="1800" dirty="0"/>
+              <a:rPr lang="en-US" sz="1600" dirty="0"/>
               <a:t>To address this issue, a </a:t>
             </a:r>
             <a:r>
-              <a:rPr lang="en-US" sz="1800" b="1" dirty="0"/>
+              <a:rPr lang="en-US" sz="1600" b="1" dirty="0"/>
               <a:t>Power BI–based interactive dashboard</a:t>
             </a:r>
             <a:r>
-              <a:rPr lang="en-US" sz="1800" dirty="0"/>
+              <a:rPr lang="en-US" sz="1600" dirty="0"/>
               <a:t> is developed. The system integrates sales data and transforms it into meaningful visualizations such as charts, graphs, and KPIs. This enables business managers to </a:t>
             </a:r>
             <a:r>
-              <a:rPr lang="en-US" sz="1800" b="1" dirty="0"/>
+              <a:rPr lang="en-US" sz="1600" b="1" dirty="0"/>
               <a:t>monitor performance, identify trends, track top-performing products, and make data-driven decisions</a:t>
             </a:r>
             <a:r>
-              <a:rPr lang="en-US" sz="1800" dirty="0"/>
+              <a:rPr lang="en-US" sz="1600" dirty="0"/>
               <a:t> efficiently.</a:t>
             </a:r>
           </a:p>
           <a:p>
             <a:r>
-              <a:rPr lang="en-US" sz="1800" dirty="0"/>
+              <a:rPr lang="en-US" sz="1600" dirty="0"/>
               <a:t>The goal of this project is to design a </a:t>
             </a:r>
             <a:r>
-              <a:rPr lang="en-US" sz="1800" b="1" dirty="0"/>
+              <a:rPr lang="en-US" sz="1600" b="1" dirty="0"/>
               <a:t>dynamic and user-friendly Power BI dashboard</a:t>
             </a:r>
             <a:r>
-              <a:rPr lang="en-US" sz="1800" dirty="0"/>
+              <a:rPr lang="en-US" sz="1600" dirty="0"/>
               <a:t> that provides real-time insights into e-commerce sales performance and supports strategic planning.</a:t>
             </a:r>
           </a:p>
@@ -3885,153 +4045,130 @@
           <a:lstStyle/>
           <a:p>
             <a:r>
-              <a:rPr lang="en-US" sz="1200" b="1" dirty="0"/>
-              <a:t>Proposed Solution:</a:t>
-            </a:r>
-            <a:endParaRPr lang="en-US" sz="1200" dirty="0"/>
-          </a:p>
-          <a:p>
-            <a:r>
-              <a:rPr lang="en-US" sz="1200" dirty="0"/>
+              <a:rPr lang="en-US" sz="1600" dirty="0"/>
               <a:t>The proposed system aims to develop an interactive </a:t>
             </a:r>
             <a:r>
-              <a:rPr lang="en-US" sz="1200" b="1" dirty="0"/>
+              <a:rPr lang="en-US" sz="1600" b="1" dirty="0"/>
               <a:t>Power BI dashboard</a:t>
             </a:r>
             <a:r>
-              <a:rPr lang="en-US" sz="1200" dirty="0"/>
+              <a:rPr lang="en-US" sz="1600" dirty="0"/>
               <a:t> that analyzes e-commerce sales data and provides meaningful business insights. The dashboard helps users easily monitor sales performance, identify trends, and compare product categories and regions.</a:t>
             </a:r>
           </a:p>
           <a:p>
             <a:r>
-              <a:rPr lang="en-US" sz="1200" dirty="0"/>
+              <a:rPr lang="en-US" sz="1600" dirty="0"/>
               <a:t>The system consists of the following components:</a:t>
             </a:r>
           </a:p>
           <a:p>
             <a:r>
-              <a:rPr lang="en-US" sz="1200" b="1" dirty="0"/>
+              <a:rPr lang="en-US" sz="1600" b="1" dirty="0"/>
               <a:t>Data Collection:</a:t>
             </a:r>
             <a:br>
-              <a:rPr lang="en-US" sz="1200" dirty="0"/>
+              <a:rPr lang="en-US" sz="1600" dirty="0"/>
             </a:br>
             <a:r>
-              <a:rPr lang="en-US" sz="1200" dirty="0"/>
+              <a:rPr lang="en-US" sz="1600" dirty="0"/>
               <a:t>The dataset containing e-commerce sales information such as product category, sales amount, profit, region, and monthly sales trends is collected and imported into Power BI.</a:t>
             </a:r>
           </a:p>
           <a:p>
             <a:r>
-              <a:rPr lang="en-US" sz="1200" b="1" dirty="0"/>
+              <a:rPr lang="en-US" sz="1600" b="1" dirty="0"/>
               <a:t>Data Processing:</a:t>
             </a:r>
             <a:br>
-              <a:rPr lang="en-US" sz="1200" dirty="0"/>
+              <a:rPr lang="en-US" sz="1600" dirty="0"/>
             </a:br>
             <a:r>
-              <a:rPr lang="en-US" sz="1200" dirty="0"/>
+              <a:rPr lang="en-US" sz="1600" dirty="0"/>
               <a:t>The dataset is cleaned and organized to ensure accuracy and consistency. Relevant fields such as sales, profit, product category, and region are used for analysis.</a:t>
             </a:r>
           </a:p>
           <a:p>
             <a:r>
-              <a:rPr lang="en-US" sz="1200" b="1" dirty="0"/>
+              <a:rPr lang="en-US" sz="1600" b="1" dirty="0"/>
               <a:t>Data Visualization:</a:t>
             </a:r>
             <a:br>
-              <a:rPr lang="en-US" sz="1200" dirty="0"/>
+              <a:rPr lang="en-US" sz="1600" dirty="0"/>
             </a:br>
             <a:r>
-              <a:rPr lang="en-US" sz="1200" dirty="0"/>
+              <a:rPr lang="en-US" sz="1600" dirty="0"/>
               <a:t>Power BI visualizations are created to represent key business metrics including:</a:t>
             </a:r>
           </a:p>
           <a:p>
             <a:r>
-              <a:rPr lang="en-US" sz="1200" dirty="0"/>
+              <a:rPr lang="en-US" sz="1600" dirty="0"/>
               <a:t>Total Sales</a:t>
             </a:r>
           </a:p>
           <a:p>
             <a:r>
-              <a:rPr lang="en-US" sz="1200" dirty="0"/>
+              <a:rPr lang="en-US" sz="1600" dirty="0"/>
               <a:t>Total Profit</a:t>
             </a:r>
           </a:p>
           <a:p>
             <a:r>
-              <a:rPr lang="en-US" sz="1200" dirty="0"/>
+              <a:rPr lang="en-US" sz="1600" dirty="0"/>
               <a:t>Total Products Sold</a:t>
             </a:r>
           </a:p>
           <a:p>
             <a:r>
-              <a:rPr lang="en-US" sz="1200" dirty="0"/>
+              <a:rPr lang="en-US" sz="1600" dirty="0"/>
               <a:t>Sales by Category</a:t>
             </a:r>
           </a:p>
           <a:p>
             <a:r>
-              <a:rPr lang="en-US" sz="1200" dirty="0"/>
-              <a:t>Monthly Sales Trends</a:t>
-            </a:r>
-          </a:p>
-          <a:p>
-            <a:r>
-              <a:rPr lang="en-US" sz="1200" dirty="0"/>
-              <a:t>Regional Sales Distribution</a:t>
-            </a:r>
-          </a:p>
-          <a:p>
-            <a:r>
-              <a:rPr lang="en-US" sz="1200" dirty="0"/>
-              <a:t>Top Products by Sales</a:t>
-            </a:r>
-          </a:p>
-          <a:p>
-            <a:r>
-              <a:rPr lang="en-US" sz="1200" b="1" dirty="0"/>
+              <a:rPr lang="en-US" sz="1600" b="1" dirty="0"/>
               <a:t>Interactive Dashboard:</a:t>
             </a:r>
             <a:br>
-              <a:rPr lang="en-US" sz="1200" dirty="0"/>
+              <a:rPr lang="en-US" sz="1600" dirty="0"/>
             </a:br>
             <a:r>
-              <a:rPr lang="en-US" sz="1200" dirty="0"/>
+              <a:rPr lang="en-US" sz="1600" dirty="0"/>
               <a:t>Interactive filters such as </a:t>
             </a:r>
             <a:r>
-              <a:rPr lang="en-US" sz="1200" b="1" dirty="0"/>
+              <a:rPr lang="en-US" sz="1600" b="1" dirty="0"/>
               <a:t>Region Filter</a:t>
             </a:r>
             <a:r>
-              <a:rPr lang="en-US" sz="1200" dirty="0"/>
+              <a:rPr lang="en-US" sz="1600" dirty="0"/>
               <a:t> and </a:t>
             </a:r>
             <a:r>
-              <a:rPr lang="en-US" sz="1200" b="1" dirty="0"/>
+              <a:rPr lang="en-US" sz="1600" b="1" dirty="0"/>
               <a:t>Category Filter</a:t>
             </a:r>
             <a:r>
-              <a:rPr lang="en-US" sz="1200" dirty="0"/>
+              <a:rPr lang="en-US" sz="1600" dirty="0"/>
               <a:t> allow users to dynamically explore the data and gain deeper insights into business performance.</a:t>
             </a:r>
           </a:p>
           <a:p>
-            <a:pPr marL="305435" indent="-305435">
-              <a:spcBef>
-                <a:spcPct val="20000"/>
-              </a:spcBef>
-              <a:spcAft>
-                <a:spcPts val="600"/>
-              </a:spcAft>
-              <a:buFont typeface="Arial" panose="020B0604020202020204"/>
-              <a:buChar char="•"/>
+            <a:endParaRPr lang="en-US" sz="1600" dirty="0"/>
+          </a:p>
+          <a:p>
+            <a:pPr marL="0" indent="0">
+              <a:buNone/>
             </a:pPr>
-            <a:endParaRPr lang="en-GB" sz="1200" dirty="0"/>
+            <a:endParaRPr lang="en-US" sz="1600" dirty="0"/>
+          </a:p>
+          <a:p>
+            <a:pPr marL="0" indent="0">
+              <a:buNone/>
+            </a:pPr>
+            <a:endParaRPr lang="en-US" sz="1600" dirty="0"/>
           </a:p>
         </p:txBody>
       </p:sp>
@@ -4113,113 +4250,113 @@
         </p:nvSpPr>
         <p:spPr>
           <a:xfrm>
-            <a:off x="317409" y="1715586"/>
-            <a:ext cx="10515600" cy="4251960"/>
+            <a:off x="317409" y="1362269"/>
+            <a:ext cx="10515600" cy="4605277"/>
           </a:xfrm>
         </p:spPr>
         <p:txBody>
           <a:bodyPr vert="horz" lIns="91440" tIns="45720" rIns="91440" bIns="45720" rtlCol="0">
-            <a:normAutofit fontScale="55000" lnSpcReduction="20000"/>
+            <a:noAutofit/>
           </a:bodyPr>
           <a:lstStyle/>
           <a:p>
             <a:r>
-              <a:rPr lang="en-US" sz="2400" b="1" dirty="0"/>
+              <a:rPr lang="en-US" sz="1600" b="1" dirty="0"/>
               <a:t>System Approach</a:t>
             </a:r>
           </a:p>
           <a:p>
             <a:r>
-              <a:rPr lang="en-US" sz="2400" dirty="0"/>
+              <a:rPr lang="en-US" sz="1600" dirty="0"/>
               <a:t>The system approach describes the process used to develop the </a:t>
             </a:r>
             <a:r>
-              <a:rPr lang="en-US" sz="2400" b="1" dirty="0"/>
+              <a:rPr lang="en-US" sz="1600" b="1" dirty="0"/>
               <a:t>E-Commerce Sales Analysis Dashboard</a:t>
             </a:r>
             <a:r>
-              <a:rPr lang="en-US" sz="2400" dirty="0"/>
+              <a:rPr lang="en-US" sz="1600" dirty="0"/>
               <a:t> using Power BI.</a:t>
             </a:r>
           </a:p>
           <a:p>
             <a:r>
-              <a:rPr lang="en-US" sz="2400" b="1" dirty="0"/>
+              <a:rPr lang="en-US" sz="1600" b="1" dirty="0"/>
               <a:t>System Requirements</a:t>
             </a:r>
-            <a:endParaRPr lang="en-US" sz="2400" dirty="0"/>
-          </a:p>
-          <a:p>
-            <a:r>
-              <a:rPr lang="en-US" sz="2400" dirty="0"/>
+            <a:endParaRPr lang="en-US" sz="1600" dirty="0"/>
+          </a:p>
+          <a:p>
+            <a:r>
+              <a:rPr lang="en-US" sz="1600" dirty="0"/>
               <a:t>Software: Power BI Desktop</a:t>
             </a:r>
           </a:p>
           <a:p>
             <a:r>
-              <a:rPr lang="en-US" sz="2400" dirty="0"/>
+              <a:rPr lang="en-US" sz="1600" dirty="0"/>
               <a:t>Dataset: E-commerce sales dataset (CSV format)</a:t>
             </a:r>
           </a:p>
           <a:p>
             <a:r>
-              <a:rPr lang="en-US" sz="2400" dirty="0"/>
+              <a:rPr lang="en-US" sz="1600" dirty="0"/>
               <a:t>Operating System: Windows 10/11</a:t>
             </a:r>
           </a:p>
           <a:p>
             <a:r>
-              <a:rPr lang="en-US" sz="2400" b="1" dirty="0"/>
+              <a:rPr lang="en-US" sz="1600" b="1" dirty="0"/>
               <a:t>Tools and Technologies</a:t>
             </a:r>
-            <a:endParaRPr lang="en-US" sz="2400" dirty="0"/>
-          </a:p>
-          <a:p>
-            <a:r>
-              <a:rPr lang="en-US" sz="2400" dirty="0"/>
+            <a:endParaRPr lang="en-US" sz="1600" dirty="0"/>
+          </a:p>
+          <a:p>
+            <a:r>
+              <a:rPr lang="en-US" sz="1600" dirty="0"/>
               <a:t>Power BI Desktop for data analysis and visualization</a:t>
             </a:r>
           </a:p>
           <a:p>
             <a:r>
-              <a:rPr lang="en-US" sz="2400" dirty="0"/>
+              <a:rPr lang="en-US" sz="1600" dirty="0"/>
               <a:t>Data cleaning and transformation using Power BI tools</a:t>
             </a:r>
           </a:p>
           <a:p>
             <a:r>
-              <a:rPr lang="en-US" sz="2400" b="1" dirty="0"/>
+              <a:rPr lang="en-US" sz="1600" b="1" dirty="0"/>
               <a:t>Development Process</a:t>
             </a:r>
-            <a:endParaRPr lang="en-US" sz="2400" dirty="0"/>
-          </a:p>
-          <a:p>
-            <a:r>
-              <a:rPr lang="en-US" sz="2400" dirty="0"/>
+            <a:endParaRPr lang="en-US" sz="1600" dirty="0"/>
+          </a:p>
+          <a:p>
+            <a:r>
+              <a:rPr lang="en-US" sz="1600" dirty="0"/>
               <a:t>Import the e-commerce sales dataset into Power BI.</a:t>
             </a:r>
           </a:p>
           <a:p>
             <a:r>
-              <a:rPr lang="en-US" sz="2400" dirty="0"/>
+              <a:rPr lang="en-US" sz="1600" dirty="0"/>
               <a:t>Clean and organize the data for analysis.</a:t>
             </a:r>
           </a:p>
           <a:p>
             <a:r>
-              <a:rPr lang="en-US" sz="2400" dirty="0"/>
+              <a:rPr lang="en-US" sz="1600" dirty="0"/>
               <a:t>Create key metrics such as Total Sales, Total Profit, and Total Products Sold.</a:t>
             </a:r>
           </a:p>
           <a:p>
             <a:r>
-              <a:rPr lang="en-US" sz="2400" dirty="0"/>
+              <a:rPr lang="en-US" sz="1600" dirty="0"/>
               <a:t>Build visualizations including bar charts, line charts, and pie charts.</a:t>
             </a:r>
           </a:p>
           <a:p>
             <a:r>
-              <a:rPr lang="en-US" sz="2400" dirty="0"/>
+              <a:rPr lang="en-US" sz="1600" dirty="0"/>
               <a:t>Add interactive filters for Region and Category to explore data dynamically.</a:t>
             </a:r>
           </a:p>
@@ -4507,136 +4644,136 @@
         </p:spPr>
         <p:txBody>
           <a:bodyPr vert="horz" lIns="91440" tIns="45720" rIns="91440" bIns="45720" rtlCol="0">
-            <a:normAutofit fontScale="70000" lnSpcReduction="20000"/>
+            <a:normAutofit/>
           </a:bodyPr>
           <a:lstStyle/>
           <a:p>
             <a:r>
-              <a:rPr lang="en-US" sz="2400" dirty="0"/>
+              <a:rPr lang="en-US" sz="1600" dirty="0"/>
               <a:t>The developed </a:t>
             </a:r>
             <a:r>
-              <a:rPr lang="en-US" sz="2400" b="1" dirty="0"/>
+              <a:rPr lang="en-US" sz="1600" b="1" dirty="0"/>
               <a:t>Power BI dashboard</a:t>
             </a:r>
             <a:r>
-              <a:rPr lang="en-US" sz="2400" dirty="0"/>
+              <a:rPr lang="en-US" sz="1600" dirty="0"/>
               <a:t> successfully visualizes e-commerce sales data and provides meaningful insights into business performance.</a:t>
             </a:r>
           </a:p>
           <a:p>
             <a:r>
-              <a:rPr lang="en-US" sz="2400" b="1" dirty="0"/>
+              <a:rPr lang="en-US" sz="1600" b="1" dirty="0"/>
               <a:t>Key Outcomes</a:t>
             </a:r>
-            <a:endParaRPr lang="en-US" sz="2400" dirty="0"/>
-          </a:p>
-          <a:p>
-            <a:r>
-              <a:rPr lang="en-US" sz="2400" dirty="0"/>
+            <a:endParaRPr lang="en-US" sz="1600" dirty="0"/>
+          </a:p>
+          <a:p>
+            <a:r>
+              <a:rPr lang="en-US" sz="1600" dirty="0"/>
               <a:t>The dashboard displays important KPIs such as </a:t>
             </a:r>
             <a:r>
-              <a:rPr lang="en-US" sz="2400" b="1" dirty="0"/>
+              <a:rPr lang="en-US" sz="1600" b="1" dirty="0"/>
               <a:t>Total Sales, Total Profit, and Total Products Sold</a:t>
             </a:r>
             <a:r>
-              <a:rPr lang="en-US" sz="2400" dirty="0"/>
+              <a:rPr lang="en-US" sz="1600" dirty="0"/>
               <a:t>.</a:t>
             </a:r>
           </a:p>
           <a:p>
             <a:r>
-              <a:rPr lang="en-US" sz="2400" dirty="0"/>
+              <a:rPr lang="en-US" sz="1600" dirty="0"/>
               <a:t>Sales performance is analyzed using </a:t>
             </a:r>
             <a:r>
-              <a:rPr lang="en-US" sz="2400" b="1" dirty="0"/>
+              <a:rPr lang="en-US" sz="1600" b="1" dirty="0"/>
               <a:t>Sales by Category</a:t>
             </a:r>
             <a:r>
-              <a:rPr lang="en-US" sz="2400" dirty="0"/>
+              <a:rPr lang="en-US" sz="1600" dirty="0"/>
               <a:t>, helping identify which product category generates the most revenue.</a:t>
             </a:r>
           </a:p>
           <a:p>
             <a:r>
-              <a:rPr lang="en-US" sz="2400" dirty="0"/>
+              <a:rPr lang="en-US" sz="1600" dirty="0"/>
               <a:t>The </a:t>
             </a:r>
             <a:r>
-              <a:rPr lang="en-US" sz="2400" b="1" dirty="0"/>
+              <a:rPr lang="en-US" sz="1600" b="1" dirty="0"/>
               <a:t>Monthly Sales Trend</a:t>
             </a:r>
             <a:r>
-              <a:rPr lang="en-US" sz="2400" dirty="0"/>
+              <a:rPr lang="en-US" sz="1600" dirty="0"/>
               <a:t> chart shows how sales vary across different months.</a:t>
             </a:r>
           </a:p>
           <a:p>
             <a:r>
-              <a:rPr lang="en-US" sz="2400" b="1" dirty="0"/>
+              <a:rPr lang="en-US" sz="1600" b="1" dirty="0"/>
               <a:t>Regional Sales Distribution</a:t>
             </a:r>
             <a:r>
-              <a:rPr lang="en-US" sz="2400" dirty="0"/>
+              <a:rPr lang="en-US" sz="1600" dirty="0"/>
               <a:t> provides insights into sales performance across different regions.</a:t>
             </a:r>
           </a:p>
           <a:p>
             <a:r>
-              <a:rPr lang="en-US" sz="2400" dirty="0"/>
+              <a:rPr lang="en-US" sz="1600" dirty="0"/>
               <a:t>The </a:t>
             </a:r>
             <a:r>
-              <a:rPr lang="en-US" sz="2400" b="1" dirty="0"/>
+              <a:rPr lang="en-US" sz="1600" b="1" dirty="0"/>
               <a:t>Top Products by Sales</a:t>
             </a:r>
             <a:r>
-              <a:rPr lang="en-US" sz="2400" dirty="0"/>
+              <a:rPr lang="en-US" sz="1600" dirty="0"/>
               <a:t> chart highlights the best-performing products.</a:t>
             </a:r>
           </a:p>
           <a:p>
             <a:r>
-              <a:rPr lang="en-US" sz="2400" b="1" dirty="0"/>
+              <a:rPr lang="en-US" sz="1600" b="1" dirty="0"/>
               <a:t>Interactive Analysis</a:t>
             </a:r>
-            <a:endParaRPr lang="en-US" sz="2400" dirty="0"/>
-          </a:p>
-          <a:p>
-            <a:r>
-              <a:rPr lang="en-US" sz="2400" dirty="0"/>
+            <a:endParaRPr lang="en-US" sz="1600" dirty="0"/>
+          </a:p>
+          <a:p>
+            <a:r>
+              <a:rPr lang="en-US" sz="1600" dirty="0"/>
               <a:t>Users can apply </a:t>
             </a:r>
             <a:r>
-              <a:rPr lang="en-US" sz="2400" b="1" dirty="0"/>
+              <a:rPr lang="en-US" sz="1600" b="1" dirty="0"/>
               <a:t>Region Filter</a:t>
             </a:r>
             <a:r>
-              <a:rPr lang="en-US" sz="2400" dirty="0"/>
+              <a:rPr lang="en-US" sz="1600" dirty="0"/>
               <a:t> and </a:t>
             </a:r>
             <a:r>
-              <a:rPr lang="en-US" sz="2400" b="1" dirty="0"/>
+              <a:rPr lang="en-US" sz="1600" b="1" dirty="0"/>
               <a:t>Category Filter</a:t>
             </a:r>
             <a:r>
-              <a:rPr lang="en-US" sz="2400" dirty="0"/>
+              <a:rPr lang="en-US" sz="1600" dirty="0"/>
               <a:t> to dynamically explore the data and gain deeper insights.</a:t>
             </a:r>
           </a:p>
           <a:p>
             <a:r>
-              <a:rPr lang="en-US" sz="2400" dirty="0"/>
+              <a:rPr lang="en-US" sz="1600" dirty="0"/>
               <a:t>The dashboard enables businesses to </a:t>
             </a:r>
             <a:r>
-              <a:rPr lang="en-US" sz="2400" b="1" dirty="0"/>
+              <a:rPr lang="en-US" sz="1600" b="1" dirty="0"/>
               <a:t>monitor sales performance, identify trends, and support data-driven decision making</a:t>
             </a:r>
             <a:r>
-              <a:rPr lang="en-US" sz="2400" dirty="0"/>
+              <a:rPr lang="en-US" sz="1600" dirty="0"/>
               <a:t>.</a:t>
             </a:r>
           </a:p>
@@ -4653,14 +4790,6 @@
 <file path=ppt/slides/slide8.xml><?xml version="1.0" encoding="utf-8"?>
 <p:sld xmlns:a="http://schemas.openxmlformats.org/drawingml/2006/main" xmlns:r="http://schemas.openxmlformats.org/officeDocument/2006/relationships" xmlns:p="http://schemas.openxmlformats.org/presentationml/2006/main">
   <p:cSld>
-    <p:bg>
-      <p:bgPr>
-        <a:solidFill>
-          <a:schemeClr val="bg1"/>
-        </a:solidFill>
-        <a:effectLst/>
-      </p:bgPr>
-    </p:bg>
     <p:spTree>
       <p:nvGrpSpPr>
         <p:cNvPr id="1" name=""/>
@@ -4675,75 +4804,48 @@
           <a:chExt cx="0" cy="0"/>
         </a:xfrm>
       </p:grpSpPr>
-      <p:sp>
-        <p:nvSpPr>
-          <p:cNvPr id="2" name="Title 1"/>
-          <p:cNvSpPr>
-            <a:spLocks noGrp="1"/>
-          </p:cNvSpPr>
-          <p:nvPr>
-            <p:ph type="title"/>
-          </p:nvPr>
-        </p:nvSpPr>
+      <p:pic>
+        <p:nvPicPr>
+          <p:cNvPr id="3" name="Picture 2">
+            <a:extLst>
+              <a:ext uri="{FF2B5EF4-FFF2-40B4-BE49-F238E27FC236}">
+                <a16:creationId xmlns:a16="http://schemas.microsoft.com/office/drawing/2014/main" id="{B58E9446-01A8-8BBC-857D-AF5E7FA75A3C}"/>
+              </a:ext>
+            </a:extLst>
+          </p:cNvPr>
+          <p:cNvPicPr>
+            <a:picLocks noChangeAspect="1"/>
+          </p:cNvPicPr>
+          <p:nvPr/>
+        </p:nvPicPr>
+        <p:blipFill>
+          <a:blip r:embed="rId2">
+            <a:extLst>
+              <a:ext uri="{28A0092B-C50C-407E-A947-70E740481C1C}">
+                <a14:useLocalDpi xmlns:a14="http://schemas.microsoft.com/office/drawing/2010/main" val="0"/>
+              </a:ext>
+            </a:extLst>
+          </a:blip>
+          <a:stretch>
+            <a:fillRect/>
+          </a:stretch>
+        </p:blipFill>
         <p:spPr>
           <a:xfrm>
-            <a:off x="-548" y="606334"/>
-            <a:ext cx="10515600" cy="1325563"/>
+            <a:off x="205272" y="718457"/>
+            <a:ext cx="11616613" cy="5902736"/>
           </a:xfrm>
+          <a:prstGeom prst="rect">
+            <a:avLst/>
+          </a:prstGeom>
         </p:spPr>
-        <p:txBody>
-          <a:bodyPr lIns="91440" tIns="45720" rIns="91440" bIns="45720" anchor="t">
-            <a:normAutofit/>
-          </a:bodyPr>
-          <a:lstStyle/>
-          <a:p>
-            <a:r>
-              <a:rPr lang="en-US" sz="4000" b="1" cap="all">
-                <a:latin typeface="Arial" panose="020B0604020202020204"/>
-                <a:cs typeface="Arial" panose="020B0604020202020204"/>
-              </a:rPr>
-              <a:t>Conclusion:</a:t>
-            </a:r>
-            <a:endParaRPr lang="en-US" sz="4000" dirty="0"/>
-          </a:p>
-        </p:txBody>
-      </p:sp>
-      <p:sp>
-        <p:nvSpPr>
-          <p:cNvPr id="3" name="Content Placeholder 2"/>
-          <p:cNvSpPr>
-            <a:spLocks noGrp="1"/>
-          </p:cNvSpPr>
-          <p:nvPr>
-            <p:ph idx="1"/>
-          </p:nvPr>
-        </p:nvSpPr>
-        <p:spPr>
-          <a:xfrm>
-            <a:off x="262589" y="1622391"/>
-            <a:ext cx="10515600" cy="4251960"/>
-          </a:xfrm>
-        </p:spPr>
-        <p:txBody>
-          <a:bodyPr vert="horz" lIns="91440" tIns="45720" rIns="91440" bIns="45720" rtlCol="0">
-            <a:normAutofit/>
-          </a:bodyPr>
-          <a:lstStyle/>
-          <a:p>
-            <a:pPr marL="0" indent="0">
-              <a:buNone/>
-            </a:pPr>
-            <a:r>
-              <a:rPr lang="en-IN" sz="2200">
-                <a:latin typeface="Franklin Gothic Book" panose="020B0503020102020204"/>
-              </a:rPr>
-              <a:t>Summarize the findings and discuss the effectiveness of the proposed solution. Highlight any challenges encountered during the implementation and potential improvements. Emphasize the importance of accurate bike count predictions for ensuring a stable supply of rental bikes in urban areas.</a:t>
-            </a:r>
-            <a:endParaRPr lang="en-US" sz="2200"/>
-          </a:p>
-        </p:txBody>
-      </p:sp>
+      </p:pic>
     </p:spTree>
+    <p:extLst>
+      <p:ext uri="{BB962C8B-B14F-4D97-AF65-F5344CB8AC3E}">
+        <p14:creationId xmlns:p14="http://schemas.microsoft.com/office/powerpoint/2010/main" val="4079985484"/>
+      </p:ext>
+    </p:extLst>
   </p:cSld>
   <p:clrMapOvr>
     <a:masterClrMapping/>
@@ -4803,7 +4905,7 @@
                 <a:latin typeface="Arial" panose="020B0604020202020204"/>
                 <a:cs typeface="Arial" panose="020B0604020202020204"/>
               </a:rPr>
-              <a:t>Future scope:</a:t>
+              <a:t>Conclusion:</a:t>
             </a:r>
             <a:endParaRPr lang="en-US" sz="4000" dirty="0"/>
           </a:p>
@@ -4821,7 +4923,7 @@
         </p:nvSpPr>
         <p:spPr>
           <a:xfrm>
-            <a:off x="268071" y="1304434"/>
+            <a:off x="262589" y="1622391"/>
             <a:ext cx="10515600" cy="4251960"/>
           </a:xfrm>
         </p:spPr>
@@ -4832,72 +4934,68 @@
           <a:lstStyle/>
           <a:p>
             <a:r>
-              <a:rPr lang="en-US" sz="2400" dirty="0"/>
-              <a:t>The dashboard can be enhanced by integrating </a:t>
-            </a:r>
-            <a:r>
-              <a:rPr lang="en-US" sz="2400" b="1" dirty="0"/>
-              <a:t>real-time sales data</a:t>
-            </a:r>
-            <a:r>
-              <a:rPr lang="en-US" sz="2400" dirty="0"/>
-              <a:t> from live business systems.</a:t>
-            </a:r>
-          </a:p>
-          <a:p>
-            <a:r>
-              <a:rPr lang="en-US" sz="2400" dirty="0"/>
-              <a:t>Additional datasets such as </a:t>
-            </a:r>
-            <a:r>
-              <a:rPr lang="en-US" sz="2400" b="1" dirty="0"/>
-              <a:t>customer demographics, marketing campaigns, and seasonal trends</a:t>
-            </a:r>
-            <a:r>
-              <a:rPr lang="en-US" sz="2400" dirty="0"/>
-              <a:t> can be incorporated for deeper analysis.</a:t>
-            </a:r>
-          </a:p>
-          <a:p>
-            <a:r>
-              <a:rPr lang="en-US" sz="2400" dirty="0"/>
-              <a:t>Advanced analytics techniques such as </a:t>
-            </a:r>
-            <a:r>
-              <a:rPr lang="en-US" sz="2400" b="1" dirty="0"/>
-              <a:t>predictive sales forecasting</a:t>
-            </a:r>
-            <a:r>
-              <a:rPr lang="en-US" sz="2400" dirty="0"/>
-              <a:t> can be implemented to estimate future sales trends.</a:t>
-            </a:r>
-          </a:p>
-          <a:p>
-            <a:r>
-              <a:rPr lang="en-US" sz="2400" dirty="0"/>
-              <a:t>The dashboard can be expanded to analyze </a:t>
-            </a:r>
-            <a:r>
-              <a:rPr lang="en-US" sz="2400" b="1" dirty="0"/>
-              <a:t>multiple regions, cities, or international markets</a:t>
-            </a:r>
-            <a:r>
-              <a:rPr lang="en-US" sz="2400" dirty="0"/>
+              <a:rPr lang="en-US" sz="1600" dirty="0"/>
+              <a:t>The </a:t>
+            </a:r>
+            <a:r>
+              <a:rPr lang="en-US" sz="1600" b="1" dirty="0"/>
+              <a:t>E-Commerce Sales Analysis Dashboard developed using Power BI</a:t>
+            </a:r>
+            <a:r>
+              <a:rPr lang="en-US" sz="1600" dirty="0"/>
+              <a:t> effectively converts complex raw sales data into clear and meaningful visual insights. By integrating various data visualization techniques such as charts, graphs, and KPIs, the dashboard provides a comprehensive overview of business performance. Key metrics including </a:t>
+            </a:r>
+            <a:r>
+              <a:rPr lang="en-US" sz="1600" b="1" dirty="0"/>
+              <a:t>Total Sales, Total Profit, Product Category Performance, Monthly Sales Trends, and Regional Sales Distribution</a:t>
+            </a:r>
+            <a:r>
+              <a:rPr lang="en-US" sz="1600" dirty="0"/>
+              <a:t> help users quickly understand important business patterns.</a:t>
+            </a:r>
+          </a:p>
+          <a:p>
+            <a:r>
+              <a:rPr lang="en-US" sz="1600" dirty="0"/>
+              <a:t>The interactive features of the dashboard, such as </a:t>
+            </a:r>
+            <a:r>
+              <a:rPr lang="en-US" sz="1600" b="1" dirty="0"/>
+              <a:t>region and category filters</a:t>
+            </a:r>
+            <a:r>
+              <a:rPr lang="en-US" sz="1600" dirty="0"/>
+              <a:t>, allow users to dynamically explore the data and gain deeper insights. This enables businesses to easily identify </a:t>
+            </a:r>
+            <a:r>
+              <a:rPr lang="en-US" sz="1600" b="1" dirty="0"/>
+              <a:t>top-performing products, seasonal sales patterns, and regional demand differences</a:t>
+            </a:r>
+            <a:r>
+              <a:rPr lang="en-US" sz="1600" dirty="0"/>
               <a:t>.</a:t>
             </a:r>
           </a:p>
           <a:p>
             <a:r>
-              <a:rPr lang="en-US" sz="2400" dirty="0"/>
-              <a:t>Integration with </a:t>
-            </a:r>
-            <a:r>
-              <a:rPr lang="en-US" sz="2400" b="1" dirty="0"/>
-              <a:t>cloud platforms and automated data refresh</a:t>
-            </a:r>
-            <a:r>
-              <a:rPr lang="en-US" sz="2400" dirty="0"/>
-              <a:t> can improve accessibility and scalability.</a:t>
+              <a:rPr lang="en-US" sz="1600" dirty="0"/>
+              <a:t>Overall, the project demonstrates how </a:t>
+            </a:r>
+            <a:r>
+              <a:rPr lang="en-US" sz="1600" b="1" dirty="0"/>
+              <a:t>Power BI can be used as a powerful business intelligence tool</a:t>
+            </a:r>
+            <a:r>
+              <a:rPr lang="en-US" sz="1600" dirty="0"/>
+              <a:t> to analyze large datasets, simplify complex information, and support </a:t>
+            </a:r>
+            <a:r>
+              <a:rPr lang="en-US" sz="1600" b="1" dirty="0"/>
+              <a:t>data-driven decision making</a:t>
+            </a:r>
+            <a:r>
+              <a:rPr lang="en-US" sz="1600" dirty="0"/>
+              <a:t>. The developed dashboard helps organizations monitor performance more efficiently and provides valuable insights that can improve strategic planning and business growth. </a:t>
             </a:r>
           </a:p>
         </p:txBody>
